--- a/Bluestock_MF_Presentation.pptx
+++ b/Bluestock_MF_Presentation.pptx
@@ -3297,7 +3297,7 @@
               </a:defRPr>
             </a:pPr>
             <a:r>
-              <a:t>Streamlit Dashboard: Executive &amp; Performance</a:t>
+              <a:t>Streamlit Dashboard: Investor &amp; Market Trends Pages</a:t>
             </a:r>
           </a:p>
         </p:txBody>
@@ -3384,7 +3384,7 @@
       </p:sp>
       <p:pic>
         <p:nvPicPr>
-          <p:cNvPr id="5" name="Picture 4" descr="Page_1_Industry_Overview.png"/>
+          <p:cNvPr id="5" name="Picture 4" descr="Page_3_Investor_Analytics.png"/>
           <p:cNvPicPr>
             <a:picLocks noChangeAspect="1"/>
           </p:cNvPicPr>
@@ -3408,7 +3408,7 @@
       </p:pic>
       <p:pic>
         <p:nvPicPr>
-          <p:cNvPr id="6" name="Picture 5" descr="Page_2_Fund_Performance.png"/>
+          <p:cNvPr id="6" name="Picture 5" descr="Page_4_SIP_Market_Trends.png"/>
           <p:cNvPicPr>
             <a:picLocks noChangeAspect="1"/>
           </p:cNvPicPr>
@@ -3479,7 +3479,7 @@
               </a:defRPr>
             </a:pPr>
             <a:r>
-              <a:t>Streamlit Dashboard: Investor &amp; Market Trends</a:t>
+              <a:t>Key Findings &amp; Business Insights</a:t>
             </a:r>
           </a:p>
         </p:txBody>
@@ -3564,54 +3564,105 @@
           </a:p>
         </p:txBody>
       </p:sp>
-      <p:pic>
-        <p:nvPicPr>
-          <p:cNvPr id="5" name="Picture 4" descr="Page_3_Investor_Analytics.png"/>
-          <p:cNvPicPr>
-            <a:picLocks noChangeAspect="1"/>
-          </p:cNvPicPr>
+      <p:sp>
+        <p:nvSpPr>
+          <p:cNvPr id="5" name="TextBox 4"/>
+          <p:cNvSpPr txBox="1"/>
           <p:nvPr/>
-        </p:nvPicPr>
-        <p:blipFill>
-          <a:blip r:embed="rId2"/>
-          <a:stretch>
-            <a:fillRect/>
-          </a:stretch>
-        </p:blipFill>
-        <p:spPr>
-          <a:xfrm>
-            <a:off x="457200" y="1463040"/>
-            <a:ext cx="5394960" cy="4389120"/>
+        </p:nvSpPr>
+        <p:spPr>
+          <a:xfrm>
+            <a:off x="457200" y="1371600"/>
+            <a:ext cx="11277295" cy="4572000"/>
           </a:xfrm>
           <a:prstGeom prst="rect">
             <a:avLst/>
           </a:prstGeom>
-        </p:spPr>
-      </p:pic>
-      <p:pic>
-        <p:nvPicPr>
-          <p:cNvPr id="6" name="Picture 5" descr="Page_4_SIP_Market_Trends.png"/>
-          <p:cNvPicPr>
-            <a:picLocks noChangeAspect="1"/>
-          </p:cNvPicPr>
-          <p:nvPr/>
-        </p:nvPicPr>
-        <p:blipFill>
-          <a:blip r:embed="rId3"/>
-          <a:stretch>
-            <a:fillRect/>
-          </a:stretch>
-        </p:blipFill>
-        <p:spPr>
-          <a:xfrm>
-            <a:off x="6217920" y="1463040"/>
-            <a:ext cx="5394960" cy="4389120"/>
-          </a:xfrm>
-          <a:prstGeom prst="rect">
-            <a:avLst/>
-          </a:prstGeom>
-        </p:spPr>
-      </p:pic>
+          <a:noFill/>
+        </p:spPr>
+        <p:txBody>
+          <a:bodyPr wrap="square">
+            <a:spAutoFit/>
+          </a:bodyPr>
+          <a:lstStyle/>
+          <a:p/>
+          <a:p>
+            <a:pPr>
+              <a:spcBef>
+                <a:spcPts val="1200"/>
+              </a:spcBef>
+              <a:defRPr sz="1500">
+                <a:solidFill>
+                  <a:srgbClr val="333333"/>
+                </a:solidFill>
+              </a:defRPr>
+            </a:pPr>
+            <a:r>
+              <a:t>• Millennial Demographics: Younger cohorts (18-35) contribute 66.3% of transaction volumes, indicating digital-first onboarding preferences.</a:t>
+            </a:r>
+          </a:p>
+          <a:p>
+            <a:pPr>
+              <a:spcBef>
+                <a:spcPts val="1200"/>
+              </a:spcBef>
+              <a:defRPr sz="1500">
+                <a:solidFill>
+                  <a:srgbClr val="333333"/>
+                </a:solidFill>
+              </a:defRPr>
+            </a:pPr>
+            <a:r>
+              <a:t>• Semi-Urban Inflows: Beyond-30 (B30) cities drive 30.1% of capital, representing a major growth market outside metro areas.</a:t>
+            </a:r>
+          </a:p>
+          <a:p>
+            <a:pPr>
+              <a:spcBef>
+                <a:spcPts val="1200"/>
+              </a:spcBef>
+              <a:defRPr sz="1500">
+                <a:solidFill>
+                  <a:srgbClr val="333333"/>
+                </a:solidFill>
+              </a:defRPr>
+            </a:pPr>
+            <a:r>
+              <a:t>• Transaction Continuity Gap: 99% of retail investors show transaction gaps &gt;35 days, indicating high SIP mandate attrition.</a:t>
+            </a:r>
+          </a:p>
+          <a:p>
+            <a:pPr>
+              <a:spcBef>
+                <a:spcPts val="1200"/>
+              </a:spcBef>
+              <a:defRPr sz="1500">
+                <a:solidFill>
+                  <a:srgbClr val="333333"/>
+                </a:solidFill>
+              </a:defRPr>
+            </a:pPr>
+            <a:r>
+              <a:t>• Diversification and Risk: Small-cap tail risk is severe (losses exceeding 3% daily), requiring balanced hybrid/debt overlays.</a:t>
+            </a:r>
+          </a:p>
+          <a:p>
+            <a:pPr>
+              <a:spcBef>
+                <a:spcPts val="1200"/>
+              </a:spcBef>
+              <a:defRPr sz="1500">
+                <a:solidFill>
+                  <a:srgbClr val="333333"/>
+                </a:solidFill>
+              </a:defRPr>
+            </a:pPr>
+            <a:r>
+              <a:t>• UPI &amp; Net Banking: Digital payments dominate the retail transaction volume, aligning with digital onboarding channels.</a:t>
+            </a:r>
+          </a:p>
+        </p:txBody>
+      </p:sp>
     </p:spTree>
   </p:cSld>
   <p:clrMapOvr>
@@ -3661,7 +3712,7 @@
               </a:defRPr>
             </a:pPr>
             <a:r>
-              <a:t>Key Takeaways &amp; Strategic Recommendations</a:t>
+              <a:t>Questions &amp; Answers</a:t>
             </a:r>
           </a:p>
         </p:txBody>
@@ -3754,8 +3805,8 @@
         </p:nvSpPr>
         <p:spPr>
           <a:xfrm>
-            <a:off x="457200" y="1371600"/>
-            <a:ext cx="11277295" cy="4572000"/>
+            <a:off x="914400" y="2011680"/>
+            <a:ext cx="10362895" cy="3657600"/>
           </a:xfrm>
           <a:prstGeom prst="rect">
             <a:avLst/>
@@ -3767,80 +3818,51 @@
             <a:spAutoFit/>
           </a:bodyPr>
           <a:lstStyle/>
-          <a:p/>
-          <a:p>
-            <a:pPr>
+          <a:p>
+            <a:pPr algn="ctr">
+              <a:defRPr sz="4800" b="1">
+                <a:solidFill>
+                  <a:srgbClr val="1F77B4"/>
+                </a:solidFill>
+                <a:latin typeface="Arial"/>
+              </a:defRPr>
+            </a:pPr>
+            <a:r>
+              <a:t>THANK YOU!</a:t>
+            </a:r>
+          </a:p>
+          <a:p>
+            <a:pPr algn="ctr">
               <a:spcBef>
-                <a:spcPts val="1200"/>
+                <a:spcPts val="2000"/>
               </a:spcBef>
-              <a:defRPr sz="1500">
-                <a:solidFill>
-                  <a:srgbClr val="333333"/>
-                </a:solidFill>
-              </a:defRPr>
-            </a:pPr>
-            <a:r>
-              <a:t>• Millennial Product Placement: Younger cohorts (18-35) make up 66.3% of users. Target them with mobile micro-SIP products.</a:t>
-            </a:r>
-          </a:p>
-          <a:p>
-            <a:pPr>
+              <a:defRPr sz="2000" b="1">
+                <a:solidFill>
+                  <a:srgbClr val="2C3E50"/>
+                </a:solidFill>
+              </a:defRPr>
+            </a:pPr>
+            <a:r>
+              <a:t>Bluestock Mutual Fund Portfolio &amp; Risk Analytics Platform</a:t>
+            </a:r>
+          </a:p>
+          <a:p>
+            <a:pPr algn="ctr">
               <a:spcBef>
-                <a:spcPts val="1200"/>
+                <a:spcPts val="1500"/>
               </a:spcBef>
-              <a:defRPr sz="1500">
-                <a:solidFill>
-                  <a:srgbClr val="333333"/>
-                </a:solidFill>
-              </a:defRPr>
-            </a:pPr>
-            <a:r>
-              <a:t>• Tap Beyond-30 (B30) Markets: B30 semi-urban regions generate 30.1% of capital. Expand digital onboarding in tier-2/3 cities.</a:t>
-            </a:r>
-          </a:p>
-          <a:p>
-            <a:pPr>
-              <a:spcBef>
-                <a:spcPts val="1200"/>
-              </a:spcBef>
-              <a:defRPr sz="1500">
-                <a:solidFill>
-                  <a:srgbClr val="333333"/>
-                </a:solidFill>
-              </a:defRPr>
-            </a:pPr>
-            <a:r>
-              <a:t>• Improve SIP Mandate Continuity: With 99% of users showing transaction gaps &gt;35 days, implement push notification reminders, flexible pause options, and bank e-mandates.</a:t>
-            </a:r>
-          </a:p>
-          <a:p>
-            <a:pPr>
-              <a:spcBef>
-                <a:spcPts val="1200"/>
-              </a:spcBef>
-              <a:defRPr sz="1500">
-                <a:solidFill>
-                  <a:srgbClr val="333333"/>
-                </a:solidFill>
-              </a:defRPr>
-            </a:pPr>
-            <a:r>
-              <a:t>• Embed Advanced Portfolio Tools: Integrate the asset allocator and Monte Carlo simulator into retail client portals.</a:t>
-            </a:r>
-          </a:p>
-          <a:p>
-            <a:pPr>
-              <a:spcBef>
-                <a:spcPts val="1200"/>
-              </a:spcBef>
-              <a:defRPr sz="1500">
-                <a:solidFill>
-                  <a:srgbClr val="333333"/>
-                </a:solidFill>
-              </a:defRPr>
-            </a:pPr>
-            <a:r>
-              <a:t>• Thank You! Any Questions?</a:t>
+              <a:defRPr sz="1400">
+                <a:solidFill>
+                  <a:srgbClr val="646E78"/>
+                </a:solidFill>
+              </a:defRPr>
+            </a:pPr>
+            <a:r>
+              <a:t>An End-to-End Star Schema, Analytics, and Financial Modeling Solution</a:t>
+            </a:r>
+            <a:br/>
+            <a:r>
+              <a:t>Author: Antigravity AI Engineer  |  Release v1.0 (Final)</a:t>
             </a:r>
           </a:p>
         </p:txBody>
@@ -5103,7 +5125,7 @@
               </a:defRPr>
             </a:pPr>
             <a:r>
-              <a:t>Performance Analytics: Return vs Volatility</a:t>
+              <a:t>Performance Metrics: Return, Volatility &amp; Frontier</a:t>
             </a:r>
           </a:p>
         </p:txBody>
@@ -5213,9 +5235,9 @@
           <a:p>
             <a:pPr>
               <a:spcBef>
-                <a:spcPts val="1000"/>
+                <a:spcPts val="800"/>
               </a:spcBef>
-              <a:defRPr sz="1400">
+              <a:defRPr sz="1300">
                 <a:solidFill>
                   <a:srgbClr val="333333"/>
                 </a:solidFill>
@@ -5228,46 +5250,46 @@
           <a:p>
             <a:pPr>
               <a:spcBef>
-                <a:spcPts val="1000"/>
+                <a:spcPts val="800"/>
               </a:spcBef>
-              <a:defRPr sz="1400">
+              <a:defRPr sz="1300">
                 <a:solidFill>
                   <a:srgbClr val="333333"/>
                 </a:solidFill>
               </a:defRPr>
             </a:pPr>
             <a:r>
-              <a:t>• Equity schemes outperform, registering an average 3-year CAGR of 14.86% and average Sharpe of 1.12.</a:t>
+              <a:t>• Equity Outperformance: Average 3-year CAGR is 14.86% (Avg Sharpe: 1.12); Hybrid schemes deliver CAGR of 11.23% (Avg Sharpe: 0.94); Debt schemes yield CAGR of 6.54% (Avg Sharpe: 0.81).</a:t>
             </a:r>
           </a:p>
           <a:p>
             <a:pPr>
               <a:spcBef>
-                <a:spcPts val="1000"/>
+                <a:spcPts val="800"/>
               </a:spcBef>
-              <a:defRPr sz="1400">
+              <a:defRPr sz="1300">
                 <a:solidFill>
                   <a:srgbClr val="333333"/>
                 </a:solidFill>
               </a:defRPr>
             </a:pPr>
             <a:r>
-              <a:t>• Hybrid portfolios register balanced return parameters (CAGR: 11.23%, Sharpe: 0.94) with lower daily standard deviations.</a:t>
+              <a:t>• Markowitz Portfolio Optimization: Covariance mapping of returns for 5 key large-cap bluechip funds identifies the Efficient Frontier curve.</a:t>
             </a:r>
           </a:p>
           <a:p>
             <a:pPr>
               <a:spcBef>
-                <a:spcPts val="1000"/>
+                <a:spcPts val="800"/>
               </a:spcBef>
-              <a:defRPr sz="1400">
+              <a:defRPr sz="1300">
                 <a:solidFill>
                   <a:srgbClr val="333333"/>
                 </a:solidFill>
               </a:defRPr>
             </a:pPr>
             <a:r>
-              <a:t>• Debt-oriented plans offer wealth preservation, registering CAGRs of 6.54% and negligible market Beta (&lt;0.15).</a:t>
+              <a:t>• Tangency Portfolio (Max Sharpe: 1.18) allocates: SBI Bluechip (32%), ICICI (28%), Nippon (25%), Kotak (15%). Minimum Variance Portfolio reduces volatility to 10.12%.</a:t>
             </a:r>
           </a:p>
         </p:txBody>
@@ -5345,7 +5367,7 @@
               </a:defRPr>
             </a:pPr>
             <a:r>
-              <a:t>Advanced Risk Analytics: VaR &amp; CVaR Tail Risks</a:t>
+              <a:t>Performance Metrics: Downside Risk &amp; Simulations</a:t>
             </a:r>
           </a:p>
         </p:txBody>
@@ -5455,9 +5477,9 @@
           <a:p>
             <a:pPr>
               <a:spcBef>
-                <a:spcPts val="1000"/>
+                <a:spcPts val="800"/>
               </a:spcBef>
-              <a:defRPr sz="1400">
+              <a:defRPr sz="1300">
                 <a:solidFill>
                   <a:srgbClr val="333333"/>
                 </a:solidFill>
@@ -5470,9 +5492,9 @@
           <a:p>
             <a:pPr>
               <a:spcBef>
-                <a:spcPts val="1000"/>
+                <a:spcPts val="800"/>
               </a:spcBef>
-              <a:defRPr sz="1400">
+              <a:defRPr sz="1300">
                 <a:solidFill>
                   <a:srgbClr val="333333"/>
                 </a:solidFill>
@@ -5485,31 +5507,46 @@
           <a:p>
             <a:pPr>
               <a:spcBef>
-                <a:spcPts val="1000"/>
+                <a:spcPts val="800"/>
               </a:spcBef>
-              <a:defRPr sz="1400">
+              <a:defRPr sz="1300">
                 <a:solidFill>
                   <a:srgbClr val="333333"/>
                 </a:solidFill>
               </a:defRPr>
             </a:pPr>
             <a:r>
-              <a:t>• Small-cap equity schemes show severe tail risk, led by ABSL Small Cap (VaR: -2.39%, CVaR: -3.03%).</a:t>
+              <a:t>• Tail Risk concentrations: Small-cap equity schemes show severe tail risk, led by ABSL Small Cap (VaR: -2.39%, CVaR: -3.03%).</a:t>
             </a:r>
           </a:p>
           <a:p>
             <a:pPr>
               <a:spcBef>
-                <a:spcPts val="1000"/>
+                <a:spcPts val="800"/>
               </a:spcBef>
-              <a:defRPr sz="1400">
+              <a:defRPr sz="1300">
                 <a:solidFill>
                   <a:srgbClr val="333333"/>
                 </a:solidFill>
               </a:defRPr>
             </a:pPr>
             <a:r>
-              <a:t>• Liquid and short-term debt schemes display negligible tail risk, with ICICI Pru Liquid showing a VaR of -0.019%.</a:t>
+              <a:t>• Monte Carlo Projections: 1,000 paths project the 5-year NAV compounding trajectory for SBI Bluechip Fund using Geometric Brownian Motion (GBM).</a:t>
+            </a:r>
+          </a:p>
+          <a:p>
+            <a:pPr>
+              <a:spcBef>
+                <a:spcPts val="800"/>
+              </a:spcBef>
+              <a:defRPr sz="1300">
+                <a:solidFill>
+                  <a:srgbClr val="333333"/>
+                </a:solidFill>
+              </a:defRPr>
+            </a:pPr>
+            <a:r>
+              <a:t>• Expected mean path projects 99.28% growth (expected NAV: ₹164.21), with 90% confidence bands between ₹94.50 and ₹248.10.</a:t>
             </a:r>
           </a:p>
         </p:txBody>
@@ -5587,7 +5624,7 @@
               </a:defRPr>
             </a:pPr>
             <a:r>
-              <a:t>Advanced Modeling: GBM &amp; Efficient Frontier</a:t>
+              <a:t>Streamlit Dashboard: Executive &amp; Performance Pages</a:t>
             </a:r>
           </a:p>
         </p:txBody>
@@ -5672,93 +5709,9 @@
           </a:p>
         </p:txBody>
       </p:sp>
-      <p:sp>
-        <p:nvSpPr>
-          <p:cNvPr id="5" name="TextBox 4"/>
-          <p:cNvSpPr txBox="1"/>
-          <p:nvPr/>
-        </p:nvSpPr>
-        <p:spPr>
-          <a:xfrm>
-            <a:off x="457200" y="1371600"/>
-            <a:ext cx="5303520" cy="4572000"/>
-          </a:xfrm>
-          <a:prstGeom prst="rect">
-            <a:avLst/>
-          </a:prstGeom>
-          <a:noFill/>
-        </p:spPr>
-        <p:txBody>
-          <a:bodyPr wrap="square">
-            <a:spAutoFit/>
-          </a:bodyPr>
-          <a:lstStyle/>
-          <a:p/>
-          <a:p>
-            <a:pPr>
-              <a:spcBef>
-                <a:spcPts val="1000"/>
-              </a:spcBef>
-              <a:defRPr sz="1400">
-                <a:solidFill>
-                  <a:srgbClr val="333333"/>
-                </a:solidFill>
-              </a:defRPr>
-            </a:pPr>
-            <a:r>
-              <a:t>• Monte Carlo: 1,000 paths project the 5-year NAV compounding trajectory for SBI Bluechip Fund using Geometric Brownian Motion.</a:t>
-            </a:r>
-          </a:p>
-          <a:p>
-            <a:pPr>
-              <a:spcBef>
-                <a:spcPts val="1000"/>
-              </a:spcBef>
-              <a:defRPr sz="1400">
-                <a:solidFill>
-                  <a:srgbClr val="333333"/>
-                </a:solidFill>
-              </a:defRPr>
-            </a:pPr>
-            <a:r>
-              <a:t>• Expected mean path projects 99.28% growth (NAV: ₹164.21), with 90% confidence bands between ₹94.50 and ₹248.10.</a:t>
-            </a:r>
-          </a:p>
-          <a:p>
-            <a:pPr>
-              <a:spcBef>
-                <a:spcPts val="1000"/>
-              </a:spcBef>
-              <a:defRPr sz="1400">
-                <a:solidFill>
-                  <a:srgbClr val="333333"/>
-                </a:solidFill>
-              </a:defRPr>
-            </a:pPr>
-            <a:r>
-              <a:t>• Markowitz Optimization: Covariance mapping of returns for 5 key bluechip funds identifies the Efficient Frontier.</a:t>
-            </a:r>
-          </a:p>
-          <a:p>
-            <a:pPr>
-              <a:spcBef>
-                <a:spcPts val="1000"/>
-              </a:spcBef>
-              <a:defRPr sz="1400">
-                <a:solidFill>
-                  <a:srgbClr val="333333"/>
-                </a:solidFill>
-              </a:defRPr>
-            </a:pPr>
-            <a:r>
-              <a:t>• Tangent Portfolio (Max Sharpe: 1.18) allocates: SBI Bluechip (32%), ICICI (28%), Nippon (25%), Kotak (15%).</a:t>
-            </a:r>
-          </a:p>
-        </p:txBody>
-      </p:sp>
       <p:pic>
         <p:nvPicPr>
-          <p:cNvPr id="6" name="Picture 5" descr="12_sector_donut.png"/>
+          <p:cNvPr id="5" name="Picture 4" descr="Page_1_Industry_Overview.png"/>
           <p:cNvPicPr>
             <a:picLocks noChangeAspect="1"/>
           </p:cNvPicPr>
@@ -5772,8 +5725,32 @@
         </p:blipFill>
         <p:spPr>
           <a:xfrm>
-            <a:off x="6217920" y="1645920"/>
-            <a:ext cx="5486400" cy="3840480"/>
+            <a:off x="457200" y="1463040"/>
+            <a:ext cx="5394960" cy="4389120"/>
+          </a:xfrm>
+          <a:prstGeom prst="rect">
+            <a:avLst/>
+          </a:prstGeom>
+        </p:spPr>
+      </p:pic>
+      <p:pic>
+        <p:nvPicPr>
+          <p:cNvPr id="6" name="Picture 5" descr="Page_2_Fund_Performance.png"/>
+          <p:cNvPicPr>
+            <a:picLocks noChangeAspect="1"/>
+          </p:cNvPicPr>
+          <p:nvPr/>
+        </p:nvPicPr>
+        <p:blipFill>
+          <a:blip r:embed="rId3"/>
+          <a:stretch>
+            <a:fillRect/>
+          </a:stretch>
+        </p:blipFill>
+        <p:spPr>
+          <a:xfrm>
+            <a:off x="6217920" y="1463040"/>
+            <a:ext cx="5394960" cy="4389120"/>
           </a:xfrm>
           <a:prstGeom prst="rect">
             <a:avLst/>
